--- a/img/Angebot-Nutzung.pptx
+++ b/img/Angebot-Nutzung.pptx
@@ -259,7 +259,7 @@
           <a:p>
             <a:fld id="{438A9FAD-80B4-B24E-A80A-544300FFDA3F}" type="datetimeFigureOut">
               <a:rPr lang="de-DE" smtClean="0"/>
-              <a:t>08.06.26</a:t>
+              <a:t>10.06.26</a:t>
             </a:fld>
             <a:endParaRPr lang="de-DE"/>
           </a:p>
@@ -457,7 +457,7 @@
           <a:p>
             <a:fld id="{438A9FAD-80B4-B24E-A80A-544300FFDA3F}" type="datetimeFigureOut">
               <a:rPr lang="de-DE" smtClean="0"/>
-              <a:t>08.06.26</a:t>
+              <a:t>10.06.26</a:t>
             </a:fld>
             <a:endParaRPr lang="de-DE"/>
           </a:p>
@@ -665,7 +665,7 @@
           <a:p>
             <a:fld id="{438A9FAD-80B4-B24E-A80A-544300FFDA3F}" type="datetimeFigureOut">
               <a:rPr lang="de-DE" smtClean="0"/>
-              <a:t>08.06.26</a:t>
+              <a:t>10.06.26</a:t>
             </a:fld>
             <a:endParaRPr lang="de-DE"/>
           </a:p>
@@ -863,7 +863,7 @@
           <a:p>
             <a:fld id="{438A9FAD-80B4-B24E-A80A-544300FFDA3F}" type="datetimeFigureOut">
               <a:rPr lang="de-DE" smtClean="0"/>
-              <a:t>08.06.26</a:t>
+              <a:t>10.06.26</a:t>
             </a:fld>
             <a:endParaRPr lang="de-DE"/>
           </a:p>
@@ -1138,7 +1138,7 @@
           <a:p>
             <a:fld id="{438A9FAD-80B4-B24E-A80A-544300FFDA3F}" type="datetimeFigureOut">
               <a:rPr lang="de-DE" smtClean="0"/>
-              <a:t>08.06.26</a:t>
+              <a:t>10.06.26</a:t>
             </a:fld>
             <a:endParaRPr lang="de-DE"/>
           </a:p>
@@ -1403,7 +1403,7 @@
           <a:p>
             <a:fld id="{438A9FAD-80B4-B24E-A80A-544300FFDA3F}" type="datetimeFigureOut">
               <a:rPr lang="de-DE" smtClean="0"/>
-              <a:t>08.06.26</a:t>
+              <a:t>10.06.26</a:t>
             </a:fld>
             <a:endParaRPr lang="de-DE"/>
           </a:p>
@@ -1815,7 +1815,7 @@
           <a:p>
             <a:fld id="{438A9FAD-80B4-B24E-A80A-544300FFDA3F}" type="datetimeFigureOut">
               <a:rPr lang="de-DE" smtClean="0"/>
-              <a:t>08.06.26</a:t>
+              <a:t>10.06.26</a:t>
             </a:fld>
             <a:endParaRPr lang="de-DE"/>
           </a:p>
@@ -1956,7 +1956,7 @@
           <a:p>
             <a:fld id="{438A9FAD-80B4-B24E-A80A-544300FFDA3F}" type="datetimeFigureOut">
               <a:rPr lang="de-DE" smtClean="0"/>
-              <a:t>08.06.26</a:t>
+              <a:t>10.06.26</a:t>
             </a:fld>
             <a:endParaRPr lang="de-DE"/>
           </a:p>
@@ -2069,7 +2069,7 @@
           <a:p>
             <a:fld id="{438A9FAD-80B4-B24E-A80A-544300FFDA3F}" type="datetimeFigureOut">
               <a:rPr lang="de-DE" smtClean="0"/>
-              <a:t>08.06.26</a:t>
+              <a:t>10.06.26</a:t>
             </a:fld>
             <a:endParaRPr lang="de-DE"/>
           </a:p>
@@ -2380,7 +2380,7 @@
           <a:p>
             <a:fld id="{438A9FAD-80B4-B24E-A80A-544300FFDA3F}" type="datetimeFigureOut">
               <a:rPr lang="de-DE" smtClean="0"/>
-              <a:t>08.06.26</a:t>
+              <a:t>10.06.26</a:t>
             </a:fld>
             <a:endParaRPr lang="de-DE"/>
           </a:p>
@@ -2668,7 +2668,7 @@
           <a:p>
             <a:fld id="{438A9FAD-80B4-B24E-A80A-544300FFDA3F}" type="datetimeFigureOut">
               <a:rPr lang="de-DE" smtClean="0"/>
-              <a:t>08.06.26</a:t>
+              <a:t>10.06.26</a:t>
             </a:fld>
             <a:endParaRPr lang="de-DE"/>
           </a:p>
@@ -2909,7 +2909,7 @@
           <a:p>
             <a:fld id="{438A9FAD-80B4-B24E-A80A-544300FFDA3F}" type="datetimeFigureOut">
               <a:rPr lang="de-DE" smtClean="0"/>
-              <a:t>08.06.26</a:t>
+              <a:t>10.06.26</a:t>
             </a:fld>
             <a:endParaRPr lang="de-DE"/>
           </a:p>
@@ -3428,7 +3428,7 @@
         <p:spPr>
           <a:xfrm>
             <a:off x="309314" y="3453369"/>
-            <a:ext cx="3147237" cy="1200329"/>
+            <a:ext cx="3147237" cy="923330"/>
           </a:xfrm>
           <a:prstGeom prst="rect">
             <a:avLst/>
@@ -3446,31 +3446,12 @@
               <a:buChar char="•"/>
             </a:pPr>
             <a:r>
-              <a:rPr lang="de-DE">
+              <a:rPr lang="de-DE" dirty="0">
                 <a:solidFill>
                   <a:srgbClr val="267326"/>
                 </a:solidFill>
               </a:rPr>
               <a:t>Überzeugungen</a:t>
-            </a:r>
-            <a:endParaRPr lang="de-DE" dirty="0">
-              <a:solidFill>
-                <a:srgbClr val="267326"/>
-              </a:solidFill>
-            </a:endParaRPr>
-          </a:p>
-          <a:p>
-            <a:pPr marL="285750" indent="-285750">
-              <a:buFont typeface="Arial" panose="020B0604020202020204" pitchFamily="34" charset="0"/>
-              <a:buChar char="•"/>
-            </a:pPr>
-            <a:r>
-              <a:rPr lang="de-DE" dirty="0">
-                <a:solidFill>
-                  <a:srgbClr val="267326"/>
-                </a:solidFill>
-              </a:rPr>
-              <a:t>Reflexionsfähigkeit</a:t>
             </a:r>
           </a:p>
           <a:p>
@@ -3541,7 +3522,7 @@
                   <a:srgbClr val="267326"/>
                 </a:solidFill>
               </a:rPr>
-              <a:t>Zugänglichkeit</a:t>
+              <a:t>Aufbereitung</a:t>
             </a:r>
           </a:p>
           <a:p>
@@ -3550,13 +3531,18 @@
               <a:buChar char="•"/>
             </a:pPr>
             <a:r>
-              <a:rPr lang="de-DE" dirty="0">
+              <a:rPr lang="de-DE">
                 <a:solidFill>
                   <a:srgbClr val="267326"/>
                 </a:solidFill>
               </a:rPr>
-              <a:t>Aufbereitung</a:t>
-            </a:r>
+              <a:t>Zugänglichkeit</a:t>
+            </a:r>
+            <a:endParaRPr lang="de-DE" dirty="0">
+              <a:solidFill>
+                <a:srgbClr val="267326"/>
+              </a:solidFill>
+            </a:endParaRPr>
           </a:p>
           <a:p>
             <a:pPr marL="285750" indent="-285750">
